--- a/slide/themes/src/24_memory book.pptx
+++ b/slide/themes/src/24_memory book.pptx
@@ -12799,9 +12799,6 @@
                     <a:lumMod val="50000"/>
                   </a:schemeClr>
                 </a:solidFill>
-                <a:latin typeface="Times New Roman"/>
-                <a:ea typeface="Times New Roman"/>
-                <a:cs typeface="Times New Roman"/>
               </a:defRPr>
             </a:lvl1pPr>
             <a:lvl2pPr marL="457200" indent="0" algn="ctr">
@@ -12812,9 +12809,6 @@
                     <a:lumMod val="50000"/>
                   </a:schemeClr>
                 </a:solidFill>
-                <a:latin typeface="Times New Roman"/>
-                <a:ea typeface="Times New Roman"/>
-                <a:cs typeface="Times New Roman"/>
               </a:defRPr>
             </a:lvl2pPr>
             <a:lvl3pPr marL="914400" indent="0" algn="ctr">
@@ -12825,9 +12819,6 @@
                     <a:lumMod val="50000"/>
                   </a:schemeClr>
                 </a:solidFill>
-                <a:latin typeface="Times New Roman"/>
-                <a:ea typeface="Times New Roman"/>
-                <a:cs typeface="Times New Roman"/>
               </a:defRPr>
             </a:lvl3pPr>
             <a:lvl4pPr marL="1371600" indent="0" algn="ctr">
@@ -12838,9 +12829,6 @@
                     <a:lumMod val="50000"/>
                   </a:schemeClr>
                 </a:solidFill>
-                <a:latin typeface="Times New Roman"/>
-                <a:ea typeface="Times New Roman"/>
-                <a:cs typeface="Times New Roman"/>
               </a:defRPr>
             </a:lvl4pPr>
             <a:lvl5pPr marL="1828800" indent="0" algn="ctr">
@@ -12851,9 +12839,6 @@
                     <a:lumMod val="50000"/>
                   </a:schemeClr>
                 </a:solidFill>
-                <a:latin typeface="Times New Roman"/>
-                <a:ea typeface="Times New Roman"/>
-                <a:cs typeface="Times New Roman"/>
               </a:defRPr>
             </a:lvl5pPr>
             <a:lvl6pPr marL="2286000" indent="0" algn="ctr">
@@ -12864,9 +12849,6 @@
                     <a:lumMod val="50000"/>
                   </a:schemeClr>
                 </a:solidFill>
-                <a:latin typeface="Times New Roman"/>
-                <a:ea typeface="Times New Roman"/>
-                <a:cs typeface="Times New Roman"/>
               </a:defRPr>
             </a:lvl6pPr>
             <a:lvl7pPr marL="2743200" indent="0" algn="ctr">
@@ -12877,9 +12859,6 @@
                     <a:lumMod val="50000"/>
                   </a:schemeClr>
                 </a:solidFill>
-                <a:latin typeface="Times New Roman"/>
-                <a:ea typeface="Times New Roman"/>
-                <a:cs typeface="Times New Roman"/>
               </a:defRPr>
             </a:lvl7pPr>
             <a:lvl8pPr marL="3200400" indent="0" algn="ctr">
@@ -12890,9 +12869,6 @@
                     <a:lumMod val="50000"/>
                   </a:schemeClr>
                 </a:solidFill>
-                <a:latin typeface="Times New Roman"/>
-                <a:ea typeface="Times New Roman"/>
-                <a:cs typeface="Times New Roman"/>
               </a:defRPr>
             </a:lvl8pPr>
             <a:lvl9pPr marL="3657600" indent="0" algn="ctr">
@@ -12903,9 +12879,6 @@
                     <a:lumMod val="50000"/>
                   </a:schemeClr>
                 </a:solidFill>
-                <a:latin typeface="Times New Roman"/>
-                <a:ea typeface="Times New Roman"/>
-                <a:cs typeface="Times New Roman"/>
               </a:defRPr>
             </a:lvl9pPr>
           </a:lstStyle>
@@ -13111,9 +13084,6 @@
                     <a:lumMod val="50000"/>
                   </a:schemeClr>
                 </a:solidFill>
-                <a:latin typeface="Times New Roman"/>
-                <a:ea typeface="Times New Roman"/>
-                <a:cs typeface="Times New Roman"/>
               </a:defRPr>
             </a:lvl1pPr>
             <a:lvl2pPr marL="457200" indent="0" algn="ctr">
@@ -13124,9 +13094,6 @@
                     <a:lumMod val="50000"/>
                   </a:schemeClr>
                 </a:solidFill>
-                <a:latin typeface="Times New Roman"/>
-                <a:ea typeface="Times New Roman"/>
-                <a:cs typeface="Times New Roman"/>
               </a:defRPr>
             </a:lvl2pPr>
             <a:lvl3pPr marL="914400" indent="0" algn="ctr">
@@ -13137,9 +13104,6 @@
                     <a:lumMod val="50000"/>
                   </a:schemeClr>
                 </a:solidFill>
-                <a:latin typeface="Times New Roman"/>
-                <a:ea typeface="Times New Roman"/>
-                <a:cs typeface="Times New Roman"/>
               </a:defRPr>
             </a:lvl3pPr>
             <a:lvl4pPr marL="1371600" indent="0" algn="ctr">
@@ -13150,9 +13114,6 @@
                     <a:lumMod val="50000"/>
                   </a:schemeClr>
                 </a:solidFill>
-                <a:latin typeface="Times New Roman"/>
-                <a:ea typeface="Times New Roman"/>
-                <a:cs typeface="Times New Roman"/>
               </a:defRPr>
             </a:lvl4pPr>
             <a:lvl5pPr marL="1828800" indent="0" algn="ctr">
@@ -13163,9 +13124,6 @@
                     <a:lumMod val="50000"/>
                   </a:schemeClr>
                 </a:solidFill>
-                <a:latin typeface="Times New Roman"/>
-                <a:ea typeface="Times New Roman"/>
-                <a:cs typeface="Times New Roman"/>
               </a:defRPr>
             </a:lvl5pPr>
             <a:lvl6pPr marL="2286000" indent="0" algn="ctr">
@@ -13176,9 +13134,6 @@
                     <a:lumMod val="50000"/>
                   </a:schemeClr>
                 </a:solidFill>
-                <a:latin typeface="Times New Roman"/>
-                <a:ea typeface="Times New Roman"/>
-                <a:cs typeface="Times New Roman"/>
               </a:defRPr>
             </a:lvl6pPr>
             <a:lvl7pPr marL="2743200" indent="0" algn="ctr">
@@ -13189,9 +13144,6 @@
                     <a:lumMod val="50000"/>
                   </a:schemeClr>
                 </a:solidFill>
-                <a:latin typeface="Times New Roman"/>
-                <a:ea typeface="Times New Roman"/>
-                <a:cs typeface="Times New Roman"/>
               </a:defRPr>
             </a:lvl7pPr>
             <a:lvl8pPr marL="3200400" indent="0" algn="ctr">
@@ -13202,9 +13154,6 @@
                     <a:lumMod val="50000"/>
                   </a:schemeClr>
                 </a:solidFill>
-                <a:latin typeface="Times New Roman"/>
-                <a:ea typeface="Times New Roman"/>
-                <a:cs typeface="Times New Roman"/>
               </a:defRPr>
             </a:lvl8pPr>
             <a:lvl9pPr marL="3657600" indent="0" algn="ctr">
@@ -13215,9 +13164,6 @@
                     <a:lumMod val="50000"/>
                   </a:schemeClr>
                 </a:solidFill>
-                <a:latin typeface="Times New Roman"/>
-                <a:ea typeface="Times New Roman"/>
-                <a:cs typeface="Times New Roman"/>
               </a:defRPr>
             </a:lvl9pPr>
           </a:lstStyle>
@@ -14584,9 +14530,6 @@
                     <a:lumMod val="50000"/>
                   </a:schemeClr>
                 </a:solidFill>
-                <a:latin typeface="Times New Roman"/>
-                <a:ea typeface="Times New Roman"/>
-                <a:cs typeface="Times New Roman"/>
               </a:defRPr>
             </a:lvl1pPr>
             <a:lvl2pPr marL="457200" indent="0">
@@ -14597,9 +14540,6 @@
                     <a:lumMod val="50000"/>
                   </a:schemeClr>
                 </a:solidFill>
-                <a:latin typeface="Times New Roman"/>
-                <a:ea typeface="Times New Roman"/>
-                <a:cs typeface="Times New Roman"/>
               </a:defRPr>
             </a:lvl2pPr>
             <a:lvl3pPr marL="914400" indent="0">
@@ -14610,9 +14550,6 @@
                     <a:lumMod val="50000"/>
                   </a:schemeClr>
                 </a:solidFill>
-                <a:latin typeface="Times New Roman"/>
-                <a:ea typeface="Times New Roman"/>
-                <a:cs typeface="Times New Roman"/>
               </a:defRPr>
             </a:lvl3pPr>
             <a:lvl4pPr marL="1371600" indent="0">
@@ -14623,9 +14560,6 @@
                     <a:lumMod val="50000"/>
                   </a:schemeClr>
                 </a:solidFill>
-                <a:latin typeface="Times New Roman"/>
-                <a:ea typeface="Times New Roman"/>
-                <a:cs typeface="Times New Roman"/>
               </a:defRPr>
             </a:lvl4pPr>
             <a:lvl5pPr marL="1828800" indent="0">
@@ -14636,9 +14570,6 @@
                     <a:lumMod val="50000"/>
                   </a:schemeClr>
                 </a:solidFill>
-                <a:latin typeface="Times New Roman"/>
-                <a:ea typeface="Times New Roman"/>
-                <a:cs typeface="Times New Roman"/>
               </a:defRPr>
             </a:lvl5pPr>
             <a:lvl6pPr marL="2286000" indent="0">
@@ -14649,9 +14580,6 @@
                     <a:lumMod val="50000"/>
                   </a:schemeClr>
                 </a:solidFill>
-                <a:latin typeface="Times New Roman"/>
-                <a:ea typeface="Times New Roman"/>
-                <a:cs typeface="Times New Roman"/>
               </a:defRPr>
             </a:lvl6pPr>
             <a:lvl7pPr marL="2743200" indent="0">
@@ -14662,9 +14590,6 @@
                     <a:lumMod val="50000"/>
                   </a:schemeClr>
                 </a:solidFill>
-                <a:latin typeface="Times New Roman"/>
-                <a:ea typeface="Times New Roman"/>
-                <a:cs typeface="Times New Roman"/>
               </a:defRPr>
             </a:lvl7pPr>
             <a:lvl8pPr marL="3200400" indent="0">
@@ -14675,9 +14600,6 @@
                     <a:lumMod val="50000"/>
                   </a:schemeClr>
                 </a:solidFill>
-                <a:latin typeface="Times New Roman"/>
-                <a:ea typeface="Times New Roman"/>
-                <a:cs typeface="Times New Roman"/>
               </a:defRPr>
             </a:lvl8pPr>
             <a:lvl9pPr marL="3657600" indent="0">
@@ -14688,9 +14610,6 @@
                     <a:lumMod val="50000"/>
                   </a:schemeClr>
                 </a:solidFill>
-                <a:latin typeface="Times New Roman"/>
-                <a:ea typeface="Times New Roman"/>
-                <a:cs typeface="Times New Roman"/>
               </a:defRPr>
             </a:lvl9pPr>
           </a:lstStyle>
@@ -17440,9 +17359,6 @@
                 <a:solidFill>
                   <a:schemeClr val="bg1"/>
                 </a:solidFill>
-                <a:latin typeface="Times New Roman"/>
-                <a:ea typeface="Times New Roman"/>
-                <a:cs typeface="Times New Roman"/>
               </a:defRPr>
             </a:lvl1pPr>
             <a:lvl2pPr>
@@ -17450,9 +17366,6 @@
                 <a:solidFill>
                   <a:schemeClr val="bg1"/>
                 </a:solidFill>
-                <a:latin typeface="Times New Roman"/>
-                <a:ea typeface="Times New Roman"/>
-                <a:cs typeface="Times New Roman"/>
               </a:defRPr>
             </a:lvl2pPr>
             <a:lvl3pPr>
@@ -17460,9 +17373,6 @@
                 <a:solidFill>
                   <a:schemeClr val="bg1"/>
                 </a:solidFill>
-                <a:latin typeface="Times New Roman"/>
-                <a:ea typeface="Times New Roman"/>
-                <a:cs typeface="Times New Roman"/>
               </a:defRPr>
             </a:lvl3pPr>
             <a:lvl4pPr>
@@ -17470,9 +17380,6 @@
                 <a:solidFill>
                   <a:schemeClr val="bg1"/>
                 </a:solidFill>
-                <a:latin typeface="Times New Roman"/>
-                <a:ea typeface="Times New Roman"/>
-                <a:cs typeface="Times New Roman"/>
               </a:defRPr>
             </a:lvl4pPr>
             <a:lvl5pPr>
@@ -17480,9 +17387,6 @@
                 <a:solidFill>
                   <a:schemeClr val="bg1"/>
                 </a:solidFill>
-                <a:latin typeface="Times New Roman"/>
-                <a:ea typeface="Times New Roman"/>
-                <a:cs typeface="Times New Roman"/>
               </a:defRPr>
             </a:lvl5pPr>
             <a:lvl6pPr>
@@ -17490,9 +17394,6 @@
                 <a:solidFill>
                   <a:schemeClr val="bg1"/>
                 </a:solidFill>
-                <a:latin typeface="Times New Roman"/>
-                <a:ea typeface="Times New Roman"/>
-                <a:cs typeface="Times New Roman"/>
               </a:defRPr>
             </a:lvl6pPr>
             <a:lvl7pPr>
@@ -17500,9 +17401,6 @@
                 <a:solidFill>
                   <a:schemeClr val="bg1"/>
                 </a:solidFill>
-                <a:latin typeface="Times New Roman"/>
-                <a:ea typeface="Times New Roman"/>
-                <a:cs typeface="Times New Roman"/>
               </a:defRPr>
             </a:lvl7pPr>
             <a:lvl8pPr>
@@ -17510,9 +17408,6 @@
                 <a:solidFill>
                   <a:schemeClr val="bg1"/>
                 </a:solidFill>
-                <a:latin typeface="Times New Roman"/>
-                <a:ea typeface="Times New Roman"/>
-                <a:cs typeface="Times New Roman"/>
               </a:defRPr>
             </a:lvl8pPr>
             <a:lvl9pPr>
@@ -17520,9 +17415,6 @@
                 <a:solidFill>
                   <a:schemeClr val="bg1"/>
                 </a:solidFill>
-                <a:latin typeface="Times New Roman"/>
-                <a:ea typeface="Times New Roman"/>
-                <a:cs typeface="Times New Roman"/>
               </a:defRPr>
             </a:lvl9pPr>
           </a:lstStyle>
@@ -18236,13 +18128,13 @@
     </a:clrScheme>
     <a:fontScheme name="Office Theme">
       <a:majorFont>
-        <a:latin typeface="Arial"/>
+        <a:latin typeface="Times New Roman"/>
         <a:ea typeface="SimSun"/>
-        <a:cs typeface="Arial"/>
+        <a:cs typeface="Times New Roman"/>
       </a:majorFont>
       <a:minorFont>
         <a:latin typeface="Arial"/>
-        <a:ea typeface="SimSun"/>
+        <a:ea typeface="Microsoft YaHei"/>
         <a:cs typeface="Arial"/>
       </a:minorFont>
     </a:fontScheme>
@@ -18473,13 +18365,13 @@
     </a:clrScheme>
     <a:fontScheme name="Arial">
       <a:majorFont>
-        <a:latin typeface="Arial"/>
-        <a:ea typeface="Arial"/>
-        <a:cs typeface="Arial"/>
+        <a:latin typeface="Times New Roman"/>
+        <a:ea typeface="SimSun"/>
+        <a:cs typeface="Times New Roman"/>
       </a:majorFont>
       <a:minorFont>
         <a:latin typeface="Arial"/>
-        <a:ea typeface="Arial"/>
+        <a:ea typeface="Microsoft YaHei"/>
         <a:cs typeface="Arial"/>
       </a:minorFont>
     </a:fontScheme>

--- a/slide/themes/src/24_memory book.pptx
+++ b/slide/themes/src/24_memory book.pptx
@@ -536,10 +536,7 @@
             <a:pPr>
               <a:defRPr/>
             </a:pPr>
-            <a:endParaRPr lang="en-US">
-              <a:latin typeface="Arial"/>
-              <a:cs typeface="Arial"/>
-            </a:endParaRPr>
+            <a:endParaRPr lang="en-US"/>
           </a:p>
         </p:txBody>
       </p:sp>

--- a/slide/themes/src/24_memory book.pptx
+++ b/slide/themes/src/24_memory book.pptx
@@ -14643,39 +14643,93 @@
           <a:lstStyle>
             <a:lvl1pPr marL="0" indent="0">
               <a:buNone/>
-              <a:defRPr sz="1600"/>
+              <a:defRPr sz="1600">
+                <a:solidFill>
+                  <a:schemeClr val="accent6">
+                    <a:lumMod val="50000"/>
+                  </a:schemeClr>
+                </a:solidFill>
+              </a:defRPr>
             </a:lvl1pPr>
             <a:lvl2pPr marL="457200" indent="0">
               <a:buNone/>
-              <a:defRPr sz="1400"/>
+              <a:defRPr sz="1400">
+                <a:solidFill>
+                  <a:schemeClr val="accent6">
+                    <a:lumMod val="50000"/>
+                  </a:schemeClr>
+                </a:solidFill>
+              </a:defRPr>
             </a:lvl2pPr>
             <a:lvl3pPr marL="914400" indent="0">
               <a:buNone/>
-              <a:defRPr sz="1200"/>
+              <a:defRPr sz="1200">
+                <a:solidFill>
+                  <a:schemeClr val="accent6">
+                    <a:lumMod val="50000"/>
+                  </a:schemeClr>
+                </a:solidFill>
+              </a:defRPr>
             </a:lvl3pPr>
             <a:lvl4pPr marL="1371600" indent="0">
               <a:buNone/>
-              <a:defRPr sz="1000"/>
+              <a:defRPr sz="1000">
+                <a:solidFill>
+                  <a:schemeClr val="accent6">
+                    <a:lumMod val="50000"/>
+                  </a:schemeClr>
+                </a:solidFill>
+              </a:defRPr>
             </a:lvl4pPr>
             <a:lvl5pPr marL="1828800" indent="0">
               <a:buNone/>
-              <a:defRPr sz="1000"/>
+              <a:defRPr sz="1000">
+                <a:solidFill>
+                  <a:schemeClr val="accent6">
+                    <a:lumMod val="50000"/>
+                  </a:schemeClr>
+                </a:solidFill>
+              </a:defRPr>
             </a:lvl5pPr>
             <a:lvl6pPr marL="2286000" indent="0">
               <a:buNone/>
-              <a:defRPr sz="1000"/>
+              <a:defRPr sz="1000">
+                <a:solidFill>
+                  <a:schemeClr val="accent6">
+                    <a:lumMod val="50000"/>
+                  </a:schemeClr>
+                </a:solidFill>
+              </a:defRPr>
             </a:lvl6pPr>
             <a:lvl7pPr marL="2743200" indent="0">
               <a:buNone/>
-              <a:defRPr sz="1000"/>
+              <a:defRPr sz="1000">
+                <a:solidFill>
+                  <a:schemeClr val="accent6">
+                    <a:lumMod val="50000"/>
+                  </a:schemeClr>
+                </a:solidFill>
+              </a:defRPr>
             </a:lvl7pPr>
             <a:lvl8pPr marL="3200400" indent="0">
               <a:buNone/>
-              <a:defRPr sz="1000"/>
+              <a:defRPr sz="1000">
+                <a:solidFill>
+                  <a:schemeClr val="accent6">
+                    <a:lumMod val="50000"/>
+                  </a:schemeClr>
+                </a:solidFill>
+              </a:defRPr>
             </a:lvl8pPr>
             <a:lvl9pPr marL="3657600" indent="0">
               <a:buNone/>
-              <a:defRPr sz="1000"/>
+              <a:defRPr sz="1000">
+                <a:solidFill>
+                  <a:schemeClr val="accent6">
+                    <a:lumMod val="50000"/>
+                  </a:schemeClr>
+                </a:solidFill>
+              </a:defRPr>
             </a:lvl9pPr>
           </a:lstStyle>
           <a:p>
